--- a/dist/초2/수학/도형과측정/초2_수학_도형과측정_04_m와cm.pptx
+++ b/dist/초2/수학/도형과측정/초2_수학_도형과측정_04_m와cm.pptx
@@ -122,13 +122,13 @@
   <p:extLst>
     <p:ext uri="{521415D9-36F7-43E2-AB2F-B90AF26B5E84}">
       <p14:sectionLst xmlns:p14="http://schemas.microsoft.com/office/powerpoint/2010/main">
-        <p14:section name="도입" id="{14b4e42f-b0cb-1f33-064f-2b267d3ee959}">
+        <p14:section name="도입" id="{b1312342-34d1-b230-392d-293243dfa643}">
           <p14:sldIdLst>
             <p14:sldId id="256"/>
             <p14:sldId id="257"/>
           </p14:sldIdLst>
         </p14:section>
-        <p14:section name="개념" id="{09c067ab-8cd4-823e-062c-96e6fe9a8292}">
+        <p14:section name="개념" id="{cb0e5d24-ca8f-bdee-8112-166a4b646478}">
           <p14:sldIdLst>
             <p14:sldId id="258"/>
             <p14:sldId id="259"/>
@@ -137,7 +137,7 @@
             <p14:sldId id="264"/>
           </p14:sldIdLst>
         </p14:section>
-        <p14:section name="연습" id="{20d46bad-b57b-9769-543d-a2b794a1704b}">
+        <p14:section name="연습" id="{1e41c976-b060-6021-b26b-beab2850cac7}">
           <p14:sldIdLst>
             <p14:sldId id="261"/>
             <p14:sldId id="262"/>
@@ -145,25 +145,25 @@
             <p14:sldId id="266"/>
           </p14:sldIdLst>
         </p14:section>
-        <p14:section name="개념" id="{3c755038-e326-7b3a-545c-43eee6f1462c}">
+        <p14:section name="개념" id="{9b7200f7-d610-dc81-b3be-280e82647ee7}">
           <p14:sldIdLst/>
         </p14:section>
-        <p14:section name="연습" id="{9f82bbbb-1b3d-e7c0-a517-770173d6f39c}">
+        <p14:section name="연습" id="{1673963d-cf33-3b7a-c59e-9ec278f105b7}">
           <p14:sldIdLst/>
         </p14:section>
-        <p14:section name="확인" id="{82b9ac96-e693-b5b9-27bc-06879fff84df}">
+        <p14:section name="확인" id="{619204da-a7e5-afdf-e138-811a8bc2357d}">
           <p14:sldIdLst>
             <p14:sldId id="267"/>
             <p14:sldId id="268"/>
             <p14:sldId id="269"/>
           </p14:sldIdLst>
         </p14:section>
-        <p14:section name="정리" id="{ed89dd57-776f-87de-fc4e-ef9f6517c426}">
+        <p14:section name="정리" id="{978d0b9b-39ef-b98c-5cc2-1739f83347a8}">
           <p14:sldIdLst>
             <p14:sldId id="270"/>
           </p14:sldIdLst>
         </p14:section>
-        <p14:section name="보충" id="{76896e3d-c852-14be-b4b1-a7f4766416cc}">
+        <p14:section name="보충" id="{aae2e8f8-9423-57e3-4b6e-3cf6420a8c76}">
           <p14:sldIdLst>
             <p14:sldId id="271"/>
           </p14:sldIdLst>
@@ -8553,7 +8553,7 @@
         </p:nvSpPr>
         <p:spPr>
           <a:xfrm>
-            <a:off x="548640" y="1773936"/>
+            <a:off x="548640" y="2219706"/>
             <a:ext cx="566928" cy="566928"/>
           </a:xfrm>
           <a:prstGeom prst="roundRect">
@@ -8600,8 +8600,8 @@
         </p:nvSpPr>
         <p:spPr>
           <a:xfrm>
-            <a:off x="1481328" y="2159000"/>
-            <a:ext cx="3931920" cy="0"/>
+            <a:off x="1481328" y="2785720"/>
+            <a:ext cx="4293108" cy="0"/>
           </a:xfrm>
           <a:prstGeom prst="line">
             <a:avLst/>
@@ -8625,7 +8625,7 @@
         </p:nvSpPr>
         <p:spPr>
           <a:xfrm>
-            <a:off x="1755648" y="2012696"/>
+            <a:off x="1755648" y="2639416"/>
             <a:ext cx="0" cy="292608"/>
           </a:xfrm>
           <a:prstGeom prst="line">
@@ -8648,7 +8648,7 @@
         </p:nvSpPr>
         <p:spPr>
           <a:xfrm>
-            <a:off x="1298448" y="2341880"/>
+            <a:off x="1298448" y="2968600"/>
             <a:ext cx="914400" cy="264160"/>
           </a:xfrm>
           <a:prstGeom prst="rect">
@@ -8687,7 +8687,7 @@
         </p:nvSpPr>
         <p:spPr>
           <a:xfrm>
-            <a:off x="2093976" y="2012696"/>
+            <a:off x="2130095" y="2639416"/>
             <a:ext cx="0" cy="292608"/>
           </a:xfrm>
           <a:prstGeom prst="line">
@@ -8710,7 +8710,7 @@
         </p:nvSpPr>
         <p:spPr>
           <a:xfrm>
-            <a:off x="1636776" y="2341880"/>
+            <a:off x="1672895" y="2968600"/>
             <a:ext cx="914400" cy="264160"/>
           </a:xfrm>
           <a:prstGeom prst="rect">
@@ -8749,7 +8749,7 @@
         </p:nvSpPr>
         <p:spPr>
           <a:xfrm>
-            <a:off x="2432304" y="2012696"/>
+            <a:off x="2504542" y="2639416"/>
             <a:ext cx="0" cy="292608"/>
           </a:xfrm>
           <a:prstGeom prst="line">
@@ -8772,7 +8772,7 @@
         </p:nvSpPr>
         <p:spPr>
           <a:xfrm>
-            <a:off x="1975104" y="2341880"/>
+            <a:off x="2047342" y="2968600"/>
             <a:ext cx="914400" cy="264160"/>
           </a:xfrm>
           <a:prstGeom prst="rect">
@@ -8811,7 +8811,7 @@
         </p:nvSpPr>
         <p:spPr>
           <a:xfrm>
-            <a:off x="2770632" y="2012696"/>
+            <a:off x="2878988" y="2639416"/>
             <a:ext cx="0" cy="292608"/>
           </a:xfrm>
           <a:prstGeom prst="line">
@@ -8834,7 +8834,7 @@
         </p:nvSpPr>
         <p:spPr>
           <a:xfrm>
-            <a:off x="2313432" y="2341880"/>
+            <a:off x="2421788" y="2968600"/>
             <a:ext cx="914400" cy="264160"/>
           </a:xfrm>
           <a:prstGeom prst="rect">
@@ -8873,7 +8873,7 @@
         </p:nvSpPr>
         <p:spPr>
           <a:xfrm>
-            <a:off x="3108960" y="2012696"/>
+            <a:off x="3253435" y="2639416"/>
             <a:ext cx="0" cy="292608"/>
           </a:xfrm>
           <a:prstGeom prst="line">
@@ -8896,7 +8896,7 @@
         </p:nvSpPr>
         <p:spPr>
           <a:xfrm>
-            <a:off x="2651760" y="2341880"/>
+            <a:off x="2796235" y="2968600"/>
             <a:ext cx="914400" cy="264160"/>
           </a:xfrm>
           <a:prstGeom prst="rect">
@@ -8935,7 +8935,7 @@
         </p:nvSpPr>
         <p:spPr>
           <a:xfrm>
-            <a:off x="3447288" y="2012696"/>
+            <a:off x="3627882" y="2639416"/>
             <a:ext cx="0" cy="292608"/>
           </a:xfrm>
           <a:prstGeom prst="line">
@@ -8958,7 +8958,7 @@
         </p:nvSpPr>
         <p:spPr>
           <a:xfrm>
-            <a:off x="2990088" y="2341880"/>
+            <a:off x="3170682" y="2968600"/>
             <a:ext cx="914400" cy="264160"/>
           </a:xfrm>
           <a:prstGeom prst="rect">
@@ -8997,7 +8997,7 @@
         </p:nvSpPr>
         <p:spPr>
           <a:xfrm>
-            <a:off x="3785616" y="2012696"/>
+            <a:off x="4002329" y="2639416"/>
             <a:ext cx="0" cy="292608"/>
           </a:xfrm>
           <a:prstGeom prst="line">
@@ -9020,7 +9020,7 @@
         </p:nvSpPr>
         <p:spPr>
           <a:xfrm>
-            <a:off x="3328416" y="2341880"/>
+            <a:off x="3545129" y="2968600"/>
             <a:ext cx="914400" cy="264160"/>
           </a:xfrm>
           <a:prstGeom prst="rect">
@@ -9059,7 +9059,7 @@
         </p:nvSpPr>
         <p:spPr>
           <a:xfrm>
-            <a:off x="4123944" y="2012696"/>
+            <a:off x="4376776" y="2639416"/>
             <a:ext cx="0" cy="292608"/>
           </a:xfrm>
           <a:prstGeom prst="line">
@@ -9082,7 +9082,7 @@
         </p:nvSpPr>
         <p:spPr>
           <a:xfrm>
-            <a:off x="3666744" y="2341880"/>
+            <a:off x="3919576" y="2968600"/>
             <a:ext cx="914400" cy="264160"/>
           </a:xfrm>
           <a:prstGeom prst="rect">
@@ -9121,7 +9121,7 @@
         </p:nvSpPr>
         <p:spPr>
           <a:xfrm>
-            <a:off x="4462272" y="2012696"/>
+            <a:off x="4751222" y="2639416"/>
             <a:ext cx="0" cy="292608"/>
           </a:xfrm>
           <a:prstGeom prst="line">
@@ -9144,7 +9144,7 @@
         </p:nvSpPr>
         <p:spPr>
           <a:xfrm>
-            <a:off x="4005072" y="2341880"/>
+            <a:off x="4294022" y="2968600"/>
             <a:ext cx="914400" cy="264160"/>
           </a:xfrm>
           <a:prstGeom prst="rect">
@@ -9183,7 +9183,7 @@
         </p:nvSpPr>
         <p:spPr>
           <a:xfrm>
-            <a:off x="4800600" y="2012696"/>
+            <a:off x="5125669" y="2639416"/>
             <a:ext cx="0" cy="292608"/>
           </a:xfrm>
           <a:prstGeom prst="line">
@@ -9206,7 +9206,7 @@
         </p:nvSpPr>
         <p:spPr>
           <a:xfrm>
-            <a:off x="4343400" y="2341880"/>
+            <a:off x="4668469" y="2968600"/>
             <a:ext cx="914400" cy="264160"/>
           </a:xfrm>
           <a:prstGeom prst="rect">
@@ -9245,7 +9245,7 @@
         </p:nvSpPr>
         <p:spPr>
           <a:xfrm>
-            <a:off x="5138928" y="2012696"/>
+            <a:off x="5500116" y="2639416"/>
             <a:ext cx="0" cy="292608"/>
           </a:xfrm>
           <a:prstGeom prst="line">
@@ -9268,7 +9268,7 @@
         </p:nvSpPr>
         <p:spPr>
           <a:xfrm>
-            <a:off x="4681728" y="2341880"/>
+            <a:off x="5042916" y="2968600"/>
             <a:ext cx="914400" cy="264160"/>
           </a:xfrm>
           <a:prstGeom prst="rect">
@@ -9307,7 +9307,7 @@
         </p:nvSpPr>
         <p:spPr>
           <a:xfrm>
-            <a:off x="2340864" y="2067560"/>
+            <a:off x="2413102" y="2694280"/>
             <a:ext cx="182880" cy="182880"/>
           </a:xfrm>
           <a:prstGeom prst="ellipse">
@@ -9332,7 +9332,7 @@
         </p:nvSpPr>
         <p:spPr>
           <a:xfrm>
-            <a:off x="4370832" y="2067560"/>
+            <a:off x="4659782" y="2694280"/>
             <a:ext cx="182880" cy="182880"/>
           </a:xfrm>
           <a:prstGeom prst="ellipse">
@@ -9357,7 +9357,7 @@
         </p:nvSpPr>
         <p:spPr>
           <a:xfrm flipV="1">
-            <a:off x="2432304" y="1774952"/>
+            <a:off x="2504542" y="2401672"/>
             <a:ext cx="0" cy="338328"/>
           </a:xfrm>
           <a:prstGeom prst="line">
@@ -9380,8 +9380,8 @@
         </p:nvSpPr>
         <p:spPr>
           <a:xfrm>
-            <a:off x="2432304" y="1774952"/>
-            <a:ext cx="2029968" cy="0"/>
+            <a:off x="2504542" y="2401672"/>
+            <a:ext cx="2246681" cy="0"/>
           </a:xfrm>
           <a:prstGeom prst="line">
             <a:avLst/>
@@ -9404,8 +9404,8 @@
         </p:nvSpPr>
         <p:spPr>
           <a:xfrm>
-            <a:off x="2432304" y="1492504"/>
-            <a:ext cx="2029968" cy="264160"/>
+            <a:off x="2504542" y="2119224"/>
+            <a:ext cx="2246681" cy="264160"/>
           </a:xfrm>
           <a:prstGeom prst="rect">
             <a:avLst/>
@@ -9443,8 +9443,8 @@
         </p:nvSpPr>
         <p:spPr>
           <a:xfrm>
-            <a:off x="1481328" y="1976120"/>
-            <a:ext cx="3931920" cy="365760"/>
+            <a:off x="1481328" y="2602840"/>
+            <a:ext cx="4293108" cy="365760"/>
           </a:xfrm>
           <a:prstGeom prst="rect">
             <a:avLst/>

--- a/dist/초2/수학/도형과측정/초2_수학_도형과측정_04_m와cm.pptx
+++ b/dist/초2/수학/도형과측정/초2_수학_도형과측정_04_m와cm.pptx
@@ -122,13 +122,13 @@
   <p:extLst>
     <p:ext uri="{521415D9-36F7-43E2-AB2F-B90AF26B5E84}">
       <p14:sectionLst xmlns:p14="http://schemas.microsoft.com/office/powerpoint/2010/main">
-        <p14:section name="도입" id="{b1312342-34d1-b230-392d-293243dfa643}">
+        <p14:section name="도입" id="{b9b4bb40-b6d3-c4af-37d9-84fa08b6b15d}">
           <p14:sldIdLst>
             <p14:sldId id="256"/>
             <p14:sldId id="257"/>
           </p14:sldIdLst>
         </p14:section>
-        <p14:section name="개념" id="{cb0e5d24-ca8f-bdee-8112-166a4b646478}">
+        <p14:section name="개념" id="{021de118-793b-edea-f16c-a67845e09e67}">
           <p14:sldIdLst>
             <p14:sldId id="258"/>
             <p14:sldId id="259"/>
@@ -137,7 +137,7 @@
             <p14:sldId id="264"/>
           </p14:sldIdLst>
         </p14:section>
-        <p14:section name="연습" id="{1e41c976-b060-6021-b26b-beab2850cac7}">
+        <p14:section name="연습" id="{680a94c0-588e-798f-2140-b42e57bf415f}">
           <p14:sldIdLst>
             <p14:sldId id="261"/>
             <p14:sldId id="262"/>
@@ -145,25 +145,25 @@
             <p14:sldId id="266"/>
           </p14:sldIdLst>
         </p14:section>
-        <p14:section name="개념" id="{9b7200f7-d610-dc81-b3be-280e82647ee7}">
+        <p14:section name="개념" id="{eb76efcf-4113-10f5-8e17-5e73b6064a1a}">
           <p14:sldIdLst/>
         </p14:section>
-        <p14:section name="연습" id="{1673963d-cf33-3b7a-c59e-9ec278f105b7}">
+        <p14:section name="연습" id="{e1409286-f214-e585-8fb1-c2f3654df7b6}">
           <p14:sldIdLst/>
         </p14:section>
-        <p14:section name="확인" id="{619204da-a7e5-afdf-e138-811a8bc2357d}">
+        <p14:section name="확인" id="{d5aa6829-4c39-c9d2-2b47-51fc81805a5c}">
           <p14:sldIdLst>
             <p14:sldId id="267"/>
             <p14:sldId id="268"/>
             <p14:sldId id="269"/>
           </p14:sldIdLst>
         </p14:section>
-        <p14:section name="정리" id="{978d0b9b-39ef-b98c-5cc2-1739f83347a8}">
+        <p14:section name="정리" id="{0ade8477-8915-67f3-52f9-4007b5af1aa8}">
           <p14:sldIdLst>
             <p14:sldId id="270"/>
           </p14:sldIdLst>
         </p14:section>
-        <p14:section name="보충" id="{aae2e8f8-9423-57e3-4b6e-3cf6420a8c76}">
+        <p14:section name="보충" id="{b93741da-ec46-9de3-fc4d-bab02b414acd}">
           <p14:sldIdLst>
             <p14:sldId id="271"/>
           </p14:sldIdLst>
@@ -3706,7 +3706,7 @@
               <a:buNone/>
             </a:pPr>
             <a:r>
-              <a:rPr lang="ko-KR" altLang="en-US" sz="1600" b="1" dirty="0">
+              <a:rPr lang="en-US" altLang="ko-KR" sz="1600" b="1" dirty="0">
                 <a:solidFill>
                   <a:srgbClr val="3D5A80"/>
                 </a:solidFill>
@@ -4065,7 +4065,7 @@
               <a:buNone/>
             </a:pPr>
             <a:r>
-              <a:rPr lang="ko-KR" altLang="en-US" sz="3600" b="1" dirty="0">
+              <a:rPr lang="en-US" altLang="ko-KR" sz="3600" b="1" dirty="0">
                 <a:solidFill>
                   <a:srgbClr val="1F2937"/>
                 </a:solidFill>
@@ -4151,7 +4151,7 @@
               <a:buNone/>
             </a:pPr>
             <a:r>
-              <a:rPr lang="ko-KR" altLang="en-US" sz="3600" b="1" dirty="0">
+              <a:rPr lang="en-US" altLang="ko-KR" sz="3600" b="1" dirty="0">
                 <a:solidFill>
                   <a:srgbClr val="1F2937"/>
                 </a:solidFill>
@@ -4237,7 +4237,7 @@
               <a:buNone/>
             </a:pPr>
             <a:r>
-              <a:rPr lang="ko-KR" altLang="en-US" sz="3600" b="1" dirty="0">
+              <a:rPr lang="en-US" altLang="ko-KR" sz="3600" b="1" dirty="0">
                 <a:solidFill>
                   <a:srgbClr val="1F2937"/>
                 </a:solidFill>
@@ -4861,7 +4861,7 @@
               <a:buNone/>
             </a:pPr>
             <a:r>
-              <a:rPr lang="ko-KR" altLang="en-US" sz="3600" b="1" dirty="0">
+              <a:rPr lang="en-US" altLang="ko-KR" sz="3600" b="1" dirty="0">
                 <a:solidFill>
                   <a:srgbClr val="1F2937"/>
                 </a:solidFill>
@@ -5302,7 +5302,7 @@
               <a:buNone/>
             </a:pPr>
             <a:r>
-              <a:rPr lang="ko-KR" altLang="en-US" sz="3200" dirty="0">
+              <a:rPr lang="en-US" altLang="ko-KR" sz="3200" dirty="0">
                 <a:solidFill>
                   <a:srgbClr val="1F2937"/>
                 </a:solidFill>
@@ -5380,7 +5380,7 @@
               <a:buNone/>
             </a:pPr>
             <a:r>
-              <a:rPr lang="ko-KR" altLang="en-US" sz="3200" dirty="0">
+              <a:rPr lang="en-US" altLang="ko-KR" sz="3200" dirty="0">
                 <a:solidFill>
                   <a:srgbClr val="1F2937"/>
                 </a:solidFill>
@@ -5458,7 +5458,7 @@
               <a:buNone/>
             </a:pPr>
             <a:r>
-              <a:rPr lang="ko-KR" altLang="en-US" sz="3200" dirty="0">
+              <a:rPr lang="en-US" altLang="ko-KR" sz="3200" dirty="0">
                 <a:solidFill>
                   <a:srgbClr val="1F2937"/>
                 </a:solidFill>
@@ -5583,7 +5583,7 @@
               <a:buNone/>
             </a:pPr>
             <a:r>
-              <a:rPr lang="ko-KR" altLang="en-US" sz="3200" dirty="0">
+              <a:rPr lang="en-US" altLang="ko-KR" sz="3200" dirty="0">
                 <a:solidFill>
                   <a:srgbClr val="1F2937"/>
                 </a:solidFill>
@@ -5661,7 +5661,7 @@
               <a:buNone/>
             </a:pPr>
             <a:r>
-              <a:rPr lang="ko-KR" altLang="en-US" sz="3200" dirty="0">
+              <a:rPr lang="en-US" altLang="ko-KR" sz="3200" dirty="0">
                 <a:solidFill>
                   <a:srgbClr val="1F2937"/>
                 </a:solidFill>
@@ -5999,7 +5999,7 @@
               <a:buNone/>
             </a:pPr>
             <a:r>
-              <a:rPr lang="ko-KR" altLang="en-US" sz="3200" dirty="0">
+              <a:rPr lang="en-US" altLang="ko-KR" sz="3200" dirty="0">
                 <a:solidFill>
                   <a:srgbClr val="1F2937"/>
                 </a:solidFill>
@@ -6115,7 +6115,7 @@
               <a:buNone/>
             </a:pPr>
             <a:r>
-              <a:rPr lang="ko-KR" altLang="en-US" sz="3200" dirty="0">
+              <a:rPr lang="en-US" altLang="ko-KR" sz="3200" dirty="0">
                 <a:solidFill>
                   <a:srgbClr val="1F2937"/>
                 </a:solidFill>
@@ -6231,7 +6231,7 @@
               <a:buNone/>
             </a:pPr>
             <a:r>
-              <a:rPr lang="ko-KR" altLang="en-US" sz="3200" dirty="0">
+              <a:rPr lang="en-US" altLang="ko-KR" sz="3200" dirty="0">
                 <a:solidFill>
                   <a:srgbClr val="1F2937"/>
                 </a:solidFill>
@@ -6347,7 +6347,7 @@
               <a:buNone/>
             </a:pPr>
             <a:r>
-              <a:rPr lang="ko-KR" altLang="en-US" sz="3200" dirty="0">
+              <a:rPr lang="en-US" altLang="ko-KR" sz="3200" dirty="0">
                 <a:solidFill>
                   <a:srgbClr val="1F2937"/>
                 </a:solidFill>
@@ -6758,7 +6758,7 @@
               <a:buNone/>
             </a:pPr>
             <a:r>
-              <a:rPr lang="ko-KR" altLang="en-US" sz="2600" dirty="0">
+              <a:rPr lang="en-US" altLang="ko-KR" sz="2600" dirty="0">
                 <a:solidFill>
                   <a:srgbClr val="FFFFFF"/>
                 </a:solidFill>
@@ -6775,7 +6775,7 @@
               <a:buNone/>
             </a:pPr>
             <a:r>
-              <a:rPr lang="ko-KR" altLang="en-US" sz="2600" dirty="0">
+              <a:rPr lang="en-US" altLang="ko-KR" sz="2600" dirty="0">
                 <a:solidFill>
                   <a:srgbClr val="FFFFFF"/>
                 </a:solidFill>
@@ -6814,7 +6814,7 @@
               <a:buNone/>
             </a:pPr>
             <a:r>
-              <a:rPr lang="ko-KR" altLang="en-US" sz="2600" dirty="0">
+              <a:rPr lang="en-US" altLang="ko-KR" sz="2600" dirty="0">
                 <a:solidFill>
                   <a:srgbClr val="FFFFFF"/>
                 </a:solidFill>
@@ -6831,7 +6831,7 @@
               <a:buNone/>
             </a:pPr>
             <a:r>
-              <a:rPr lang="ko-KR" altLang="en-US" sz="2600" dirty="0">
+              <a:rPr lang="en-US" altLang="ko-KR" sz="2600" dirty="0">
                 <a:solidFill>
                   <a:srgbClr val="FFFFFF"/>
                 </a:solidFill>
@@ -10842,7 +10842,7 @@
               <a:buNone/>
             </a:pPr>
             <a:r>
-              <a:rPr lang="ko-KR" altLang="en-US" sz="2600" b="1" dirty="0">
+              <a:rPr lang="en-US" altLang="ko-KR" sz="2600" b="1" dirty="0">
                 <a:solidFill>
                   <a:srgbClr val="3D5A80"/>
                 </a:solidFill>
@@ -11093,7 +11093,7 @@
               <a:buNone/>
             </a:pPr>
             <a:r>
-              <a:rPr lang="ko-KR" altLang="en-US" sz="3200" b="1" dirty="0">
+              <a:rPr lang="en-US" altLang="ko-KR" sz="3200" b="1" dirty="0">
                 <a:solidFill>
                   <a:srgbClr val="1F2937"/>
                 </a:solidFill>
@@ -11874,7 +11874,7 @@
               <a:buNone/>
             </a:pPr>
             <a:r>
-              <a:rPr lang="ko-KR" altLang="en-US" sz="2400" b="1" dirty="0">
+              <a:rPr lang="en-US" altLang="ko-KR" sz="2400" b="1" dirty="0">
                 <a:solidFill>
                   <a:srgbClr val="3D5A80"/>
                 </a:solidFill>
@@ -11960,7 +11960,7 @@
               <a:buNone/>
             </a:pPr>
             <a:r>
-              <a:rPr lang="ko-KR" altLang="en-US" sz="2400" b="1" dirty="0">
+              <a:rPr lang="en-US" altLang="ko-KR" sz="2400" b="1" dirty="0">
                 <a:solidFill>
                   <a:srgbClr val="3D5A80"/>
                 </a:solidFill>
@@ -12142,7 +12142,7 @@
               <a:buNone/>
             </a:pPr>
             <a:r>
-              <a:rPr lang="ko-KR" altLang="en-US" sz="3600" b="1" dirty="0">
+              <a:rPr lang="en-US" altLang="ko-KR" sz="3600" b="1" dirty="0">
                 <a:solidFill>
                   <a:srgbClr val="1F2937"/>
                 </a:solidFill>
@@ -13172,7 +13172,7 @@
               <a:buNone/>
             </a:pPr>
             <a:r>
-              <a:rPr lang="ko-KR" altLang="en-US" sz="1600" b="1" dirty="0">
+              <a:rPr lang="en-US" altLang="ko-KR" sz="1600" b="1" dirty="0">
                 <a:solidFill>
                   <a:srgbClr val="3D5A80"/>
                 </a:solidFill>
@@ -13258,7 +13258,7 @@
               <a:buNone/>
             </a:pPr>
             <a:r>
-              <a:rPr lang="ko-KR" altLang="en-US" sz="1600" b="1" dirty="0">
+              <a:rPr lang="en-US" altLang="ko-KR" sz="1600" b="1" dirty="0">
                 <a:solidFill>
                   <a:srgbClr val="3D5A80"/>
                 </a:solidFill>
@@ -13625,7 +13625,7 @@
               <a:buNone/>
             </a:pPr>
             <a:r>
-              <a:rPr lang="ko-KR" altLang="en-US" sz="3200" dirty="0">
+              <a:rPr lang="en-US" altLang="ko-KR" sz="3200" dirty="0">
                 <a:solidFill>
                   <a:srgbClr val="1F2937"/>
                 </a:solidFill>
@@ -13894,7 +13894,7 @@
               <a:buNone/>
             </a:pPr>
             <a:r>
-              <a:rPr lang="ko-KR" altLang="en-US" sz="3600" b="1" dirty="0">
+              <a:rPr lang="en-US" altLang="ko-KR" sz="3600" b="1" dirty="0">
                 <a:solidFill>
                   <a:srgbClr val="1F2937"/>
                 </a:solidFill>
@@ -13980,7 +13980,7 @@
               <a:buNone/>
             </a:pPr>
             <a:r>
-              <a:rPr lang="ko-KR" altLang="en-US" sz="3600" b="1" dirty="0">
+              <a:rPr lang="en-US" altLang="ko-KR" sz="3600" b="1" dirty="0">
                 <a:solidFill>
                   <a:srgbClr val="1F2937"/>
                 </a:solidFill>
@@ -14066,7 +14066,7 @@
               <a:buNone/>
             </a:pPr>
             <a:r>
-              <a:rPr lang="ko-KR" altLang="en-US" sz="3600" b="1" dirty="0">
+              <a:rPr lang="en-US" altLang="ko-KR" sz="3600" b="1" dirty="0">
                 <a:solidFill>
                   <a:srgbClr val="1F2937"/>
                 </a:solidFill>
@@ -14152,7 +14152,7 @@
               <a:buNone/>
             </a:pPr>
             <a:r>
-              <a:rPr lang="ko-KR" altLang="en-US" sz="3600" b="1" dirty="0">
+              <a:rPr lang="en-US" altLang="ko-KR" sz="3600" b="1" dirty="0">
                 <a:solidFill>
                   <a:srgbClr val="1F2937"/>
                 </a:solidFill>
@@ -14729,7 +14729,7 @@
               <a:buNone/>
             </a:pPr>
             <a:r>
-              <a:rPr lang="ko-KR" altLang="en-US" sz="3600" b="1" dirty="0">
+              <a:rPr lang="en-US" altLang="ko-KR" sz="3600" b="1" dirty="0">
                 <a:solidFill>
                   <a:srgbClr val="1F2937"/>
                 </a:solidFill>
@@ -14758,7 +14758,7 @@
           </p:nvPr>
         </p:nvGraphicFramePr>
         <p:xfrm>
-          <a:off x="7789408" y="3355340"/>
+          <a:off x="7789408" y="3388360"/>
           <a:ext cx="3840480" cy="914400"/>
         </p:xfrm>
         <a:graphic>
@@ -14770,7 +14770,7 @@
                 <a:gridCol w="1536192"/>
                 <a:gridCol w="1536192"/>
               </a:tblGrid>
-              <a:tr h="528320">
+              <a:tr h="511810">
                 <a:tc>
                   <a:txBody>
                     <a:bodyPr/>
@@ -14965,7 +14965,7 @@
                   </a:tcPr>
                 </a:tc>
               </a:tr>
-              <a:tr h="528320">
+              <a:tr h="511810">
                 <a:tc>
                   <a:txBody>
                     <a:bodyPr/>
@@ -15160,7 +15160,7 @@
                   </a:tcPr>
                 </a:tc>
               </a:tr>
-              <a:tr h="528320">
+              <a:tr h="511810">
                 <a:tc>
                   <a:txBody>
                     <a:bodyPr/>
@@ -15366,7 +15366,7 @@
                   </a:tcPr>
                 </a:tc>
               </a:tr>
-              <a:tr h="528320">
+              <a:tr h="511810">
                 <a:tc>
                   <a:txBody>
                     <a:bodyPr/>
@@ -15956,7 +15956,7 @@
               <a:buNone/>
             </a:pPr>
             <a:r>
-              <a:rPr lang="ko-KR" altLang="en-US" sz="3600" b="1" dirty="0">
+              <a:rPr lang="en-US" altLang="ko-KR" sz="3600" b="1" dirty="0">
                 <a:solidFill>
                   <a:srgbClr val="1F2937"/>
                 </a:solidFill>
@@ -15985,7 +15985,7 @@
           </p:nvPr>
         </p:nvGraphicFramePr>
         <p:xfrm>
-          <a:off x="7789408" y="3355340"/>
+          <a:off x="7789408" y="3388360"/>
           <a:ext cx="3840480" cy="914400"/>
         </p:xfrm>
         <a:graphic>
@@ -15997,7 +15997,7 @@
                 <a:gridCol w="1536192"/>
                 <a:gridCol w="1536192"/>
               </a:tblGrid>
-              <a:tr h="528320">
+              <a:tr h="511810">
                 <a:tc>
                   <a:txBody>
                     <a:bodyPr/>
@@ -16192,7 +16192,7 @@
                   </a:tcPr>
                 </a:tc>
               </a:tr>
-              <a:tr h="528320">
+              <a:tr h="511810">
                 <a:tc>
                   <a:txBody>
                     <a:bodyPr/>
@@ -16387,7 +16387,7 @@
                   </a:tcPr>
                 </a:tc>
               </a:tr>
-              <a:tr h="528320">
+              <a:tr h="511810">
                 <a:tc>
                   <a:txBody>
                     <a:bodyPr/>
@@ -16593,7 +16593,7 @@
                   </a:tcPr>
                 </a:tc>
               </a:tr>
-              <a:tr h="528320">
+              <a:tr h="511810">
                 <a:tc>
                   <a:txBody>
                     <a:bodyPr/>
